--- a/docs/Kuja_Partner_Pitch_Deck_V2.pptx
+++ b/docs/Kuja_Partner_Pitch_Deck_V2.pptx
@@ -5365,8 +5365,8 @@
         </p:nvSpPr>
         <p:spPr>
           <a:xfrm>
-            <a:off x="274320" y="1280160"/>
-            <a:ext cx="2011680" cy="548640"/>
+            <a:off x="274320" y="1234440"/>
+            <a:ext cx="2011680" cy="502920"/>
           </a:xfrm>
           <a:prstGeom prst="rect">
             <a:avLst/>
@@ -5418,8 +5418,8 @@
         </p:nvSpPr>
         <p:spPr>
           <a:xfrm>
-            <a:off x="2286000" y="1280160"/>
-            <a:ext cx="1188720" cy="548640"/>
+            <a:off x="2286000" y="1234440"/>
+            <a:ext cx="1188720" cy="502920"/>
           </a:xfrm>
           <a:prstGeom prst="rect">
             <a:avLst/>
@@ -5471,8 +5471,8 @@
         </p:nvSpPr>
         <p:spPr>
           <a:xfrm>
-            <a:off x="3474720" y="1280160"/>
-            <a:ext cx="1188720" cy="548640"/>
+            <a:off x="3474720" y="1234440"/>
+            <a:ext cx="1188720" cy="502920"/>
           </a:xfrm>
           <a:prstGeom prst="rect">
             <a:avLst/>
@@ -5524,8 +5524,8 @@
         </p:nvSpPr>
         <p:spPr>
           <a:xfrm>
-            <a:off x="4663440" y="1280160"/>
-            <a:ext cx="1188720" cy="548640"/>
+            <a:off x="4663440" y="1234440"/>
+            <a:ext cx="1188720" cy="502920"/>
           </a:xfrm>
           <a:prstGeom prst="rect">
             <a:avLst/>
@@ -5577,8 +5577,8 @@
         </p:nvSpPr>
         <p:spPr>
           <a:xfrm>
-            <a:off x="5852160" y="1280160"/>
-            <a:ext cx="1188720" cy="548640"/>
+            <a:off x="5852160" y="1234440"/>
+            <a:ext cx="1188720" cy="502920"/>
           </a:xfrm>
           <a:prstGeom prst="rect">
             <a:avLst/>
@@ -5630,8 +5630,8 @@
         </p:nvSpPr>
         <p:spPr>
           <a:xfrm>
-            <a:off x="7040880" y="1280160"/>
-            <a:ext cx="1188720" cy="548640"/>
+            <a:off x="7040880" y="1234440"/>
+            <a:ext cx="1188720" cy="502920"/>
           </a:xfrm>
           <a:prstGeom prst="rect">
             <a:avLst/>
@@ -5683,8 +5683,8 @@
         </p:nvSpPr>
         <p:spPr>
           <a:xfrm>
-            <a:off x="8229600" y="1280160"/>
-            <a:ext cx="1188720" cy="548640"/>
+            <a:off x="8229600" y="1234440"/>
+            <a:ext cx="1188720" cy="502920"/>
           </a:xfrm>
           <a:prstGeom prst="rect">
             <a:avLst/>
@@ -5736,8 +5736,8 @@
         </p:nvSpPr>
         <p:spPr>
           <a:xfrm>
-            <a:off x="9418320" y="1280160"/>
-            <a:ext cx="1188720" cy="548640"/>
+            <a:off x="9418320" y="1234440"/>
+            <a:ext cx="1188720" cy="502920"/>
           </a:xfrm>
           <a:prstGeom prst="rect">
             <a:avLst/>
@@ -5789,8 +5789,8 @@
         </p:nvSpPr>
         <p:spPr>
           <a:xfrm>
-            <a:off x="10607040" y="1280160"/>
-            <a:ext cx="1188720" cy="548640"/>
+            <a:off x="10607040" y="1234440"/>
+            <a:ext cx="1188720" cy="502920"/>
           </a:xfrm>
           <a:prstGeom prst="rect">
             <a:avLst/>
@@ -5842,8 +5842,8 @@
         </p:nvSpPr>
         <p:spPr>
           <a:xfrm>
-            <a:off x="274320" y="1828800"/>
-            <a:ext cx="2011680" cy="548640"/>
+            <a:off x="274320" y="1737360"/>
+            <a:ext cx="2011680" cy="502920"/>
           </a:xfrm>
           <a:prstGeom prst="rect">
             <a:avLst/>
@@ -5895,8 +5895,8 @@
         </p:nvSpPr>
         <p:spPr>
           <a:xfrm>
-            <a:off x="2286000" y="1828800"/>
-            <a:ext cx="1188720" cy="548640"/>
+            <a:off x="2286000" y="1737360"/>
+            <a:ext cx="1188720" cy="502920"/>
           </a:xfrm>
           <a:prstGeom prst="rect">
             <a:avLst/>
@@ -5948,8 +5948,8 @@
         </p:nvSpPr>
         <p:spPr>
           <a:xfrm>
-            <a:off x="3474720" y="1828800"/>
-            <a:ext cx="1188720" cy="548640"/>
+            <a:off x="3474720" y="1737360"/>
+            <a:ext cx="1188720" cy="502920"/>
           </a:xfrm>
           <a:prstGeom prst="rect">
             <a:avLst/>
@@ -6001,8 +6001,8 @@
         </p:nvSpPr>
         <p:spPr>
           <a:xfrm>
-            <a:off x="4663440" y="1828800"/>
-            <a:ext cx="1188720" cy="548640"/>
+            <a:off x="4663440" y="1737360"/>
+            <a:ext cx="1188720" cy="502920"/>
           </a:xfrm>
           <a:prstGeom prst="rect">
             <a:avLst/>
@@ -6054,8 +6054,8 @@
         </p:nvSpPr>
         <p:spPr>
           <a:xfrm>
-            <a:off x="5852160" y="1828800"/>
-            <a:ext cx="1188720" cy="548640"/>
+            <a:off x="5852160" y="1737360"/>
+            <a:ext cx="1188720" cy="502920"/>
           </a:xfrm>
           <a:prstGeom prst="rect">
             <a:avLst/>
@@ -6107,8 +6107,8 @@
         </p:nvSpPr>
         <p:spPr>
           <a:xfrm>
-            <a:off x="7040880" y="1828800"/>
-            <a:ext cx="1188720" cy="548640"/>
+            <a:off x="7040880" y="1737360"/>
+            <a:ext cx="1188720" cy="502920"/>
           </a:xfrm>
           <a:prstGeom prst="rect">
             <a:avLst/>
@@ -6160,8 +6160,8 @@
         </p:nvSpPr>
         <p:spPr>
           <a:xfrm>
-            <a:off x="8229600" y="1828800"/>
-            <a:ext cx="1188720" cy="548640"/>
+            <a:off x="8229600" y="1737360"/>
+            <a:ext cx="1188720" cy="502920"/>
           </a:xfrm>
           <a:prstGeom prst="rect">
             <a:avLst/>
@@ -6213,8 +6213,8 @@
         </p:nvSpPr>
         <p:spPr>
           <a:xfrm>
-            <a:off x="9418320" y="1828800"/>
-            <a:ext cx="1188720" cy="548640"/>
+            <a:off x="9418320" y="1737360"/>
+            <a:ext cx="1188720" cy="502920"/>
           </a:xfrm>
           <a:prstGeom prst="rect">
             <a:avLst/>
@@ -6266,8 +6266,8 @@
         </p:nvSpPr>
         <p:spPr>
           <a:xfrm>
-            <a:off x="10607040" y="1828800"/>
-            <a:ext cx="1188720" cy="548640"/>
+            <a:off x="10607040" y="1737360"/>
+            <a:ext cx="1188720" cy="502920"/>
           </a:xfrm>
           <a:prstGeom prst="rect">
             <a:avLst/>
@@ -6319,8 +6319,8 @@
         </p:nvSpPr>
         <p:spPr>
           <a:xfrm>
-            <a:off x="274320" y="2377440"/>
-            <a:ext cx="2011680" cy="548640"/>
+            <a:off x="274320" y="2240280"/>
+            <a:ext cx="2011680" cy="502920"/>
           </a:xfrm>
           <a:prstGeom prst="rect">
             <a:avLst/>
@@ -6372,8 +6372,8 @@
         </p:nvSpPr>
         <p:spPr>
           <a:xfrm>
-            <a:off x="2286000" y="2377440"/>
-            <a:ext cx="1188720" cy="548640"/>
+            <a:off x="2286000" y="2240280"/>
+            <a:ext cx="1188720" cy="502920"/>
           </a:xfrm>
           <a:prstGeom prst="rect">
             <a:avLst/>
@@ -6425,8 +6425,8 @@
         </p:nvSpPr>
         <p:spPr>
           <a:xfrm>
-            <a:off x="3474720" y="2377440"/>
-            <a:ext cx="1188720" cy="548640"/>
+            <a:off x="3474720" y="2240280"/>
+            <a:ext cx="1188720" cy="502920"/>
           </a:xfrm>
           <a:prstGeom prst="rect">
             <a:avLst/>
@@ -6478,8 +6478,8 @@
         </p:nvSpPr>
         <p:spPr>
           <a:xfrm>
-            <a:off x="4663440" y="2377440"/>
-            <a:ext cx="1188720" cy="548640"/>
+            <a:off x="4663440" y="2240280"/>
+            <a:ext cx="1188720" cy="502920"/>
           </a:xfrm>
           <a:prstGeom prst="rect">
             <a:avLst/>
@@ -6531,8 +6531,8 @@
         </p:nvSpPr>
         <p:spPr>
           <a:xfrm>
-            <a:off x="5852160" y="2377440"/>
-            <a:ext cx="1188720" cy="548640"/>
+            <a:off x="5852160" y="2240280"/>
+            <a:ext cx="1188720" cy="502920"/>
           </a:xfrm>
           <a:prstGeom prst="rect">
             <a:avLst/>
@@ -6584,8 +6584,8 @@
         </p:nvSpPr>
         <p:spPr>
           <a:xfrm>
-            <a:off x="7040880" y="2377440"/>
-            <a:ext cx="1188720" cy="548640"/>
+            <a:off x="7040880" y="2240280"/>
+            <a:ext cx="1188720" cy="502920"/>
           </a:xfrm>
           <a:prstGeom prst="rect">
             <a:avLst/>
@@ -6637,8 +6637,8 @@
         </p:nvSpPr>
         <p:spPr>
           <a:xfrm>
-            <a:off x="8229600" y="2377440"/>
-            <a:ext cx="1188720" cy="548640"/>
+            <a:off x="8229600" y="2240280"/>
+            <a:ext cx="1188720" cy="502920"/>
           </a:xfrm>
           <a:prstGeom prst="rect">
             <a:avLst/>
@@ -6690,8 +6690,8 @@
         </p:nvSpPr>
         <p:spPr>
           <a:xfrm>
-            <a:off x="9418320" y="2377440"/>
-            <a:ext cx="1188720" cy="548640"/>
+            <a:off x="9418320" y="2240280"/>
+            <a:ext cx="1188720" cy="502920"/>
           </a:xfrm>
           <a:prstGeom prst="rect">
             <a:avLst/>
@@ -6743,8 +6743,8 @@
         </p:nvSpPr>
         <p:spPr>
           <a:xfrm>
-            <a:off x="10607040" y="2377440"/>
-            <a:ext cx="1188720" cy="548640"/>
+            <a:off x="10607040" y="2240280"/>
+            <a:ext cx="1188720" cy="502920"/>
           </a:xfrm>
           <a:prstGeom prst="rect">
             <a:avLst/>
@@ -6796,8 +6796,8 @@
         </p:nvSpPr>
         <p:spPr>
           <a:xfrm>
-            <a:off x="274320" y="2926080"/>
-            <a:ext cx="2011680" cy="548640"/>
+            <a:off x="274320" y="2743200"/>
+            <a:ext cx="2011680" cy="502920"/>
           </a:xfrm>
           <a:prstGeom prst="rect">
             <a:avLst/>
@@ -6849,8 +6849,8 @@
         </p:nvSpPr>
         <p:spPr>
           <a:xfrm>
-            <a:off x="2286000" y="2926080"/>
-            <a:ext cx="1188720" cy="548640"/>
+            <a:off x="2286000" y="2743200"/>
+            <a:ext cx="1188720" cy="502920"/>
           </a:xfrm>
           <a:prstGeom prst="rect">
             <a:avLst/>
@@ -6902,8 +6902,8 @@
         </p:nvSpPr>
         <p:spPr>
           <a:xfrm>
-            <a:off x="3474720" y="2926080"/>
-            <a:ext cx="1188720" cy="548640"/>
+            <a:off x="3474720" y="2743200"/>
+            <a:ext cx="1188720" cy="502920"/>
           </a:xfrm>
           <a:prstGeom prst="rect">
             <a:avLst/>
@@ -6955,8 +6955,8 @@
         </p:nvSpPr>
         <p:spPr>
           <a:xfrm>
-            <a:off x="4663440" y="2926080"/>
-            <a:ext cx="1188720" cy="548640"/>
+            <a:off x="4663440" y="2743200"/>
+            <a:ext cx="1188720" cy="502920"/>
           </a:xfrm>
           <a:prstGeom prst="rect">
             <a:avLst/>
@@ -7008,8 +7008,8 @@
         </p:nvSpPr>
         <p:spPr>
           <a:xfrm>
-            <a:off x="5852160" y="2926080"/>
-            <a:ext cx="1188720" cy="548640"/>
+            <a:off x="5852160" y="2743200"/>
+            <a:ext cx="1188720" cy="502920"/>
           </a:xfrm>
           <a:prstGeom prst="rect">
             <a:avLst/>
@@ -7061,8 +7061,8 @@
         </p:nvSpPr>
         <p:spPr>
           <a:xfrm>
-            <a:off x="7040880" y="2926080"/>
-            <a:ext cx="1188720" cy="548640"/>
+            <a:off x="7040880" y="2743200"/>
+            <a:ext cx="1188720" cy="502920"/>
           </a:xfrm>
           <a:prstGeom prst="rect">
             <a:avLst/>
@@ -7114,8 +7114,8 @@
         </p:nvSpPr>
         <p:spPr>
           <a:xfrm>
-            <a:off x="8229600" y="2926080"/>
-            <a:ext cx="1188720" cy="548640"/>
+            <a:off x="8229600" y="2743200"/>
+            <a:ext cx="1188720" cy="502920"/>
           </a:xfrm>
           <a:prstGeom prst="rect">
             <a:avLst/>
@@ -7167,8 +7167,8 @@
         </p:nvSpPr>
         <p:spPr>
           <a:xfrm>
-            <a:off x="9418320" y="2926080"/>
-            <a:ext cx="1188720" cy="548640"/>
+            <a:off x="9418320" y="2743200"/>
+            <a:ext cx="1188720" cy="502920"/>
           </a:xfrm>
           <a:prstGeom prst="rect">
             <a:avLst/>
@@ -7220,8 +7220,8 @@
         </p:nvSpPr>
         <p:spPr>
           <a:xfrm>
-            <a:off x="10607040" y="2926080"/>
-            <a:ext cx="1188720" cy="548640"/>
+            <a:off x="10607040" y="2743200"/>
+            <a:ext cx="1188720" cy="502920"/>
           </a:xfrm>
           <a:prstGeom prst="rect">
             <a:avLst/>
@@ -7273,8 +7273,8 @@
         </p:nvSpPr>
         <p:spPr>
           <a:xfrm>
-            <a:off x="274320" y="3474720"/>
-            <a:ext cx="2011680" cy="548640"/>
+            <a:off x="274320" y="3246120"/>
+            <a:ext cx="2011680" cy="502920"/>
           </a:xfrm>
           <a:prstGeom prst="rect">
             <a:avLst/>
@@ -7313,7 +7313,7 @@
               </a:defRPr>
             </a:pPr>
             <a:r>
-              <a:t>Global South Design</a:t>
+              <a:t>Multi-Language</a:t>
             </a:r>
           </a:p>
         </p:txBody>
@@ -7326,8 +7326,8 @@
         </p:nvSpPr>
         <p:spPr>
           <a:xfrm>
-            <a:off x="2286000" y="3474720"/>
-            <a:ext cx="1188720" cy="548640"/>
+            <a:off x="2286000" y="3246120"/>
+            <a:ext cx="1188720" cy="502920"/>
           </a:xfrm>
           <a:prstGeom prst="rect">
             <a:avLst/>
@@ -7379,8 +7379,8 @@
         </p:nvSpPr>
         <p:spPr>
           <a:xfrm>
-            <a:off x="3474720" y="3474720"/>
-            <a:ext cx="1188720" cy="548640"/>
+            <a:off x="3474720" y="3246120"/>
+            <a:ext cx="1188720" cy="502920"/>
           </a:xfrm>
           <a:prstGeom prst="rect">
             <a:avLst/>
@@ -7432,8 +7432,8 @@
         </p:nvSpPr>
         <p:spPr>
           <a:xfrm>
-            <a:off x="4663440" y="3474720"/>
-            <a:ext cx="1188720" cy="548640"/>
+            <a:off x="4663440" y="3246120"/>
+            <a:ext cx="1188720" cy="502920"/>
           </a:xfrm>
           <a:prstGeom prst="rect">
             <a:avLst/>
@@ -7485,8 +7485,8 @@
         </p:nvSpPr>
         <p:spPr>
           <a:xfrm>
-            <a:off x="5852160" y="3474720"/>
-            <a:ext cx="1188720" cy="548640"/>
+            <a:off x="5852160" y="3246120"/>
+            <a:ext cx="1188720" cy="502920"/>
           </a:xfrm>
           <a:prstGeom prst="rect">
             <a:avLst/>
@@ -7519,13 +7519,13 @@
             <a:pPr algn="ctr">
               <a:defRPr sz="2000" b="1">
                 <a:solidFill>
-                  <a:srgbClr val="F59E0B"/>
-                </a:solidFill>
-                <a:latin typeface="Calibri"/>
-              </a:defRPr>
-            </a:pPr>
-            <a:r>
-              <a:t>◐</a:t>
+                  <a:srgbClr val="DC2626"/>
+                </a:solidFill>
+                <a:latin typeface="Calibri"/>
+              </a:defRPr>
+            </a:pPr>
+            <a:r>
+              <a:t>✗</a:t>
             </a:r>
           </a:p>
         </p:txBody>
@@ -7538,8 +7538,8 @@
         </p:nvSpPr>
         <p:spPr>
           <a:xfrm>
-            <a:off x="7040880" y="3474720"/>
-            <a:ext cx="1188720" cy="548640"/>
+            <a:off x="7040880" y="3246120"/>
+            <a:ext cx="1188720" cy="502920"/>
           </a:xfrm>
           <a:prstGeom prst="rect">
             <a:avLst/>
@@ -7572,13 +7572,13 @@
             <a:pPr algn="ctr">
               <a:defRPr sz="2000" b="1">
                 <a:solidFill>
-                  <a:srgbClr val="16A34A"/>
-                </a:solidFill>
-                <a:latin typeface="Calibri"/>
-              </a:defRPr>
-            </a:pPr>
-            <a:r>
-              <a:t>✓</a:t>
+                  <a:srgbClr val="DC2626"/>
+                </a:solidFill>
+                <a:latin typeface="Calibri"/>
+              </a:defRPr>
+            </a:pPr>
+            <a:r>
+              <a:t>✗</a:t>
             </a:r>
           </a:p>
         </p:txBody>
@@ -7591,8 +7591,8 @@
         </p:nvSpPr>
         <p:spPr>
           <a:xfrm>
-            <a:off x="8229600" y="3474720"/>
-            <a:ext cx="1188720" cy="548640"/>
+            <a:off x="8229600" y="3246120"/>
+            <a:ext cx="1188720" cy="502920"/>
           </a:xfrm>
           <a:prstGeom prst="rect">
             <a:avLst/>
@@ -7625,13 +7625,13 @@
             <a:pPr algn="ctr">
               <a:defRPr sz="2000" b="1">
                 <a:solidFill>
-                  <a:srgbClr val="16A34A"/>
-                </a:solidFill>
-                <a:latin typeface="Calibri"/>
-              </a:defRPr>
-            </a:pPr>
-            <a:r>
-              <a:t>✓</a:t>
+                  <a:srgbClr val="DC2626"/>
+                </a:solidFill>
+                <a:latin typeface="Calibri"/>
+              </a:defRPr>
+            </a:pPr>
+            <a:r>
+              <a:t>✗</a:t>
             </a:r>
           </a:p>
         </p:txBody>
@@ -7644,8 +7644,8 @@
         </p:nvSpPr>
         <p:spPr>
           <a:xfrm>
-            <a:off x="9418320" y="3474720"/>
-            <a:ext cx="1188720" cy="548640"/>
+            <a:off x="9418320" y="3246120"/>
+            <a:ext cx="1188720" cy="502920"/>
           </a:xfrm>
           <a:prstGeom prst="rect">
             <a:avLst/>
@@ -7697,8 +7697,8 @@
         </p:nvSpPr>
         <p:spPr>
           <a:xfrm>
-            <a:off x="10607040" y="3474720"/>
-            <a:ext cx="1188720" cy="548640"/>
+            <a:off x="10607040" y="3246120"/>
+            <a:ext cx="1188720" cy="502920"/>
           </a:xfrm>
           <a:prstGeom prst="rect">
             <a:avLst/>
@@ -7750,8 +7750,8 @@
         </p:nvSpPr>
         <p:spPr>
           <a:xfrm>
-            <a:off x="274320" y="4023360"/>
-            <a:ext cx="2011680" cy="548640"/>
+            <a:off x="274320" y="3749040"/>
+            <a:ext cx="2011680" cy="502920"/>
           </a:xfrm>
           <a:prstGeom prst="rect">
             <a:avLst/>
@@ -7790,7 +7790,7 @@
               </a:defRPr>
             </a:pPr>
             <a:r>
-              <a:t>Marketplace</a:t>
+              <a:t>Global South Design</a:t>
             </a:r>
           </a:p>
         </p:txBody>
@@ -7803,8 +7803,8 @@
         </p:nvSpPr>
         <p:spPr>
           <a:xfrm>
-            <a:off x="2286000" y="4023360"/>
-            <a:ext cx="1188720" cy="548640"/>
+            <a:off x="2286000" y="3749040"/>
+            <a:ext cx="1188720" cy="502920"/>
           </a:xfrm>
           <a:prstGeom prst="rect">
             <a:avLst/>
@@ -7856,8 +7856,8 @@
         </p:nvSpPr>
         <p:spPr>
           <a:xfrm>
-            <a:off x="3474720" y="4023360"/>
-            <a:ext cx="1188720" cy="548640"/>
+            <a:off x="3474720" y="3749040"/>
+            <a:ext cx="1188720" cy="502920"/>
           </a:xfrm>
           <a:prstGeom prst="rect">
             <a:avLst/>
@@ -7909,8 +7909,8 @@
         </p:nvSpPr>
         <p:spPr>
           <a:xfrm>
-            <a:off x="4663440" y="4023360"/>
-            <a:ext cx="1188720" cy="548640"/>
+            <a:off x="4663440" y="3749040"/>
+            <a:ext cx="1188720" cy="502920"/>
           </a:xfrm>
           <a:prstGeom prst="rect">
             <a:avLst/>
@@ -7962,8 +7962,8 @@
         </p:nvSpPr>
         <p:spPr>
           <a:xfrm>
-            <a:off x="5852160" y="4023360"/>
-            <a:ext cx="1188720" cy="548640"/>
+            <a:off x="5852160" y="3749040"/>
+            <a:ext cx="1188720" cy="502920"/>
           </a:xfrm>
           <a:prstGeom prst="rect">
             <a:avLst/>
@@ -7996,13 +7996,13 @@
             <a:pPr algn="ctr">
               <a:defRPr sz="2000" b="1">
                 <a:solidFill>
-                  <a:srgbClr val="DC2626"/>
-                </a:solidFill>
-                <a:latin typeface="Calibri"/>
-              </a:defRPr>
-            </a:pPr>
-            <a:r>
-              <a:t>✗</a:t>
+                  <a:srgbClr val="F59E0B"/>
+                </a:solidFill>
+                <a:latin typeface="Calibri"/>
+              </a:defRPr>
+            </a:pPr>
+            <a:r>
+              <a:t>◐</a:t>
             </a:r>
           </a:p>
         </p:txBody>
@@ -8015,8 +8015,8 @@
         </p:nvSpPr>
         <p:spPr>
           <a:xfrm>
-            <a:off x="7040880" y="4023360"/>
-            <a:ext cx="1188720" cy="548640"/>
+            <a:off x="7040880" y="3749040"/>
+            <a:ext cx="1188720" cy="502920"/>
           </a:xfrm>
           <a:prstGeom prst="rect">
             <a:avLst/>
@@ -8049,13 +8049,13 @@
             <a:pPr algn="ctr">
               <a:defRPr sz="2000" b="1">
                 <a:solidFill>
-                  <a:srgbClr val="DC2626"/>
-                </a:solidFill>
-                <a:latin typeface="Calibri"/>
-              </a:defRPr>
-            </a:pPr>
-            <a:r>
-              <a:t>✗</a:t>
+                  <a:srgbClr val="16A34A"/>
+                </a:solidFill>
+                <a:latin typeface="Calibri"/>
+              </a:defRPr>
+            </a:pPr>
+            <a:r>
+              <a:t>✓</a:t>
             </a:r>
           </a:p>
         </p:txBody>
@@ -8068,8 +8068,8 @@
         </p:nvSpPr>
         <p:spPr>
           <a:xfrm>
-            <a:off x="8229600" y="4023360"/>
-            <a:ext cx="1188720" cy="548640"/>
+            <a:off x="8229600" y="3749040"/>
+            <a:ext cx="1188720" cy="502920"/>
           </a:xfrm>
           <a:prstGeom prst="rect">
             <a:avLst/>
@@ -8121,8 +8121,8 @@
         </p:nvSpPr>
         <p:spPr>
           <a:xfrm>
-            <a:off x="9418320" y="4023360"/>
-            <a:ext cx="1188720" cy="548640"/>
+            <a:off x="9418320" y="3749040"/>
+            <a:ext cx="1188720" cy="502920"/>
           </a:xfrm>
           <a:prstGeom prst="rect">
             <a:avLst/>
@@ -8174,8 +8174,8 @@
         </p:nvSpPr>
         <p:spPr>
           <a:xfrm>
-            <a:off x="10607040" y="4023360"/>
-            <a:ext cx="1188720" cy="548640"/>
+            <a:off x="10607040" y="3749040"/>
+            <a:ext cx="1188720" cy="502920"/>
           </a:xfrm>
           <a:prstGeom prst="rect">
             <a:avLst/>
@@ -8227,8 +8227,8 @@
         </p:nvSpPr>
         <p:spPr>
           <a:xfrm>
-            <a:off x="274320" y="4572000"/>
-            <a:ext cx="2011680" cy="548640"/>
+            <a:off x="274320" y="4251960"/>
+            <a:ext cx="2011680" cy="502920"/>
           </a:xfrm>
           <a:prstGeom prst="rect">
             <a:avLst/>
@@ -8267,7 +8267,7 @@
               </a:defRPr>
             </a:pPr>
             <a:r>
-              <a:t>Affordable for CSOs</a:t>
+              <a:t>Marketplace</a:t>
             </a:r>
           </a:p>
         </p:txBody>
@@ -8280,8 +8280,8 @@
         </p:nvSpPr>
         <p:spPr>
           <a:xfrm>
-            <a:off x="2286000" y="4572000"/>
-            <a:ext cx="1188720" cy="548640"/>
+            <a:off x="2286000" y="4251960"/>
+            <a:ext cx="1188720" cy="502920"/>
           </a:xfrm>
           <a:prstGeom prst="rect">
             <a:avLst/>
@@ -8333,8 +8333,8 @@
         </p:nvSpPr>
         <p:spPr>
           <a:xfrm>
-            <a:off x="3474720" y="4572000"/>
-            <a:ext cx="1188720" cy="548640"/>
+            <a:off x="3474720" y="4251960"/>
+            <a:ext cx="1188720" cy="502920"/>
           </a:xfrm>
           <a:prstGeom prst="rect">
             <a:avLst/>
@@ -8386,8 +8386,8 @@
         </p:nvSpPr>
         <p:spPr>
           <a:xfrm>
-            <a:off x="4663440" y="4572000"/>
-            <a:ext cx="1188720" cy="548640"/>
+            <a:off x="4663440" y="4251960"/>
+            <a:ext cx="1188720" cy="502920"/>
           </a:xfrm>
           <a:prstGeom prst="rect">
             <a:avLst/>
@@ -8439,8 +8439,8 @@
         </p:nvSpPr>
         <p:spPr>
           <a:xfrm>
-            <a:off x="5852160" y="4572000"/>
-            <a:ext cx="1188720" cy="548640"/>
+            <a:off x="5852160" y="4251960"/>
+            <a:ext cx="1188720" cy="502920"/>
           </a:xfrm>
           <a:prstGeom prst="rect">
             <a:avLst/>
@@ -8492,8 +8492,8 @@
         </p:nvSpPr>
         <p:spPr>
           <a:xfrm>
-            <a:off x="7040880" y="4572000"/>
-            <a:ext cx="1188720" cy="548640"/>
+            <a:off x="7040880" y="4251960"/>
+            <a:ext cx="1188720" cy="502920"/>
           </a:xfrm>
           <a:prstGeom prst="rect">
             <a:avLst/>
@@ -8526,13 +8526,13 @@
             <a:pPr algn="ctr">
               <a:defRPr sz="2000" b="1">
                 <a:solidFill>
-                  <a:srgbClr val="16A34A"/>
-                </a:solidFill>
-                <a:latin typeface="Calibri"/>
-              </a:defRPr>
-            </a:pPr>
-            <a:r>
-              <a:t>✓</a:t>
+                  <a:srgbClr val="DC2626"/>
+                </a:solidFill>
+                <a:latin typeface="Calibri"/>
+              </a:defRPr>
+            </a:pPr>
+            <a:r>
+              <a:t>✗</a:t>
             </a:r>
           </a:p>
         </p:txBody>
@@ -8545,8 +8545,8 @@
         </p:nvSpPr>
         <p:spPr>
           <a:xfrm>
-            <a:off x="8229600" y="4572000"/>
-            <a:ext cx="1188720" cy="548640"/>
+            <a:off x="8229600" y="4251960"/>
+            <a:ext cx="1188720" cy="502920"/>
           </a:xfrm>
           <a:prstGeom prst="rect">
             <a:avLst/>
@@ -8598,8 +8598,8 @@
         </p:nvSpPr>
         <p:spPr>
           <a:xfrm>
-            <a:off x="9418320" y="4572000"/>
-            <a:ext cx="1188720" cy="548640"/>
+            <a:off x="9418320" y="4251960"/>
+            <a:ext cx="1188720" cy="502920"/>
           </a:xfrm>
           <a:prstGeom prst="rect">
             <a:avLst/>
@@ -8651,8 +8651,8 @@
         </p:nvSpPr>
         <p:spPr>
           <a:xfrm>
-            <a:off x="10607040" y="4572000"/>
-            <a:ext cx="1188720" cy="548640"/>
+            <a:off x="10607040" y="4251960"/>
+            <a:ext cx="1188720" cy="502920"/>
           </a:xfrm>
           <a:prstGeom prst="rect">
             <a:avLst/>
@@ -8704,8 +8704,8 @@
         </p:nvSpPr>
         <p:spPr>
           <a:xfrm>
-            <a:off x="274320" y="5120640"/>
-            <a:ext cx="2011680" cy="548640"/>
+            <a:off x="274320" y="4754880"/>
+            <a:ext cx="2011680" cy="502920"/>
           </a:xfrm>
           <a:prstGeom prst="rect">
             <a:avLst/>
@@ -8744,7 +8744,7 @@
               </a:defRPr>
             </a:pPr>
             <a:r>
-              <a:t>Due Diligence</a:t>
+              <a:t>Affordable for CSOs</a:t>
             </a:r>
           </a:p>
         </p:txBody>
@@ -8757,8 +8757,8 @@
         </p:nvSpPr>
         <p:spPr>
           <a:xfrm>
-            <a:off x="2286000" y="5120640"/>
-            <a:ext cx="1188720" cy="548640"/>
+            <a:off x="2286000" y="4754880"/>
+            <a:ext cx="1188720" cy="502920"/>
           </a:xfrm>
           <a:prstGeom prst="rect">
             <a:avLst/>
@@ -8810,8 +8810,8 @@
         </p:nvSpPr>
         <p:spPr>
           <a:xfrm>
-            <a:off x="3474720" y="5120640"/>
-            <a:ext cx="1188720" cy="548640"/>
+            <a:off x="3474720" y="4754880"/>
+            <a:ext cx="1188720" cy="502920"/>
           </a:xfrm>
           <a:prstGeom prst="rect">
             <a:avLst/>
@@ -8863,8 +8863,8 @@
         </p:nvSpPr>
         <p:spPr>
           <a:xfrm>
-            <a:off x="4663440" y="5120640"/>
-            <a:ext cx="1188720" cy="548640"/>
+            <a:off x="4663440" y="4754880"/>
+            <a:ext cx="1188720" cy="502920"/>
           </a:xfrm>
           <a:prstGeom prst="rect">
             <a:avLst/>
@@ -8916,8 +8916,8 @@
         </p:nvSpPr>
         <p:spPr>
           <a:xfrm>
-            <a:off x="5852160" y="5120640"/>
-            <a:ext cx="1188720" cy="548640"/>
+            <a:off x="5852160" y="4754880"/>
+            <a:ext cx="1188720" cy="502920"/>
           </a:xfrm>
           <a:prstGeom prst="rect">
             <a:avLst/>
@@ -8969,8 +8969,8 @@
         </p:nvSpPr>
         <p:spPr>
           <a:xfrm>
-            <a:off x="7040880" y="5120640"/>
-            <a:ext cx="1188720" cy="548640"/>
+            <a:off x="7040880" y="4754880"/>
+            <a:ext cx="1188720" cy="502920"/>
           </a:xfrm>
           <a:prstGeom prst="rect">
             <a:avLst/>
@@ -9003,13 +9003,13 @@
             <a:pPr algn="ctr">
               <a:defRPr sz="2000" b="1">
                 <a:solidFill>
-                  <a:srgbClr val="DC2626"/>
-                </a:solidFill>
-                <a:latin typeface="Calibri"/>
-              </a:defRPr>
-            </a:pPr>
-            <a:r>
-              <a:t>✗</a:t>
+                  <a:srgbClr val="16A34A"/>
+                </a:solidFill>
+                <a:latin typeface="Calibri"/>
+              </a:defRPr>
+            </a:pPr>
+            <a:r>
+              <a:t>✓</a:t>
             </a:r>
           </a:p>
         </p:txBody>
@@ -9022,8 +9022,8 @@
         </p:nvSpPr>
         <p:spPr>
           <a:xfrm>
-            <a:off x="8229600" y="5120640"/>
-            <a:ext cx="1188720" cy="548640"/>
+            <a:off x="8229600" y="4754880"/>
+            <a:ext cx="1188720" cy="502920"/>
           </a:xfrm>
           <a:prstGeom prst="rect">
             <a:avLst/>
@@ -9056,13 +9056,13 @@
             <a:pPr algn="ctr">
               <a:defRPr sz="2000" b="1">
                 <a:solidFill>
-                  <a:srgbClr val="DC2626"/>
-                </a:solidFill>
-                <a:latin typeface="Calibri"/>
-              </a:defRPr>
-            </a:pPr>
-            <a:r>
-              <a:t>✗</a:t>
+                  <a:srgbClr val="16A34A"/>
+                </a:solidFill>
+                <a:latin typeface="Calibri"/>
+              </a:defRPr>
+            </a:pPr>
+            <a:r>
+              <a:t>✓</a:t>
             </a:r>
           </a:p>
         </p:txBody>
@@ -9075,8 +9075,8 @@
         </p:nvSpPr>
         <p:spPr>
           <a:xfrm>
-            <a:off x="9418320" y="5120640"/>
-            <a:ext cx="1188720" cy="548640"/>
+            <a:off x="9418320" y="4754880"/>
+            <a:ext cx="1188720" cy="502920"/>
           </a:xfrm>
           <a:prstGeom prst="rect">
             <a:avLst/>
@@ -9128,8 +9128,8 @@
         </p:nvSpPr>
         <p:spPr>
           <a:xfrm>
-            <a:off x="10607040" y="5120640"/>
-            <a:ext cx="1188720" cy="548640"/>
+            <a:off x="10607040" y="4754880"/>
+            <a:ext cx="1188720" cy="502920"/>
           </a:xfrm>
           <a:prstGeom prst="rect">
             <a:avLst/>
@@ -9162,13 +9162,13 @@
             <a:pPr algn="ctr">
               <a:defRPr sz="2000" b="1">
                 <a:solidFill>
-                  <a:srgbClr val="F59E0B"/>
-                </a:solidFill>
-                <a:latin typeface="Calibri"/>
-              </a:defRPr>
-            </a:pPr>
-            <a:r>
-              <a:t>◐</a:t>
+                  <a:srgbClr val="DC2626"/>
+                </a:solidFill>
+                <a:latin typeface="Calibri"/>
+              </a:defRPr>
+            </a:pPr>
+            <a:r>
+              <a:t>✗</a:t>
             </a:r>
           </a:p>
         </p:txBody>
@@ -9181,8 +9181,8 @@
         </p:nvSpPr>
         <p:spPr>
           <a:xfrm>
-            <a:off x="274320" y="5669280"/>
-            <a:ext cx="2011680" cy="548640"/>
+            <a:off x="274320" y="5257800"/>
+            <a:ext cx="2011680" cy="502920"/>
           </a:xfrm>
           <a:prstGeom prst="rect">
             <a:avLst/>
@@ -9221,7 +9221,7 @@
               </a:defRPr>
             </a:pPr>
             <a:r>
-              <a:t>Reporting Module</a:t>
+              <a:t>Due Diligence</a:t>
             </a:r>
           </a:p>
         </p:txBody>
@@ -9234,8 +9234,8 @@
         </p:nvSpPr>
         <p:spPr>
           <a:xfrm>
-            <a:off x="2286000" y="5669280"/>
-            <a:ext cx="1188720" cy="548640"/>
+            <a:off x="2286000" y="5257800"/>
+            <a:ext cx="1188720" cy="502920"/>
           </a:xfrm>
           <a:prstGeom prst="rect">
             <a:avLst/>
@@ -9287,8 +9287,8 @@
         </p:nvSpPr>
         <p:spPr>
           <a:xfrm>
-            <a:off x="3474720" y="5669280"/>
-            <a:ext cx="1188720" cy="548640"/>
+            <a:off x="3474720" y="5257800"/>
+            <a:ext cx="1188720" cy="502920"/>
           </a:xfrm>
           <a:prstGeom prst="rect">
             <a:avLst/>
@@ -9321,13 +9321,13 @@
             <a:pPr algn="ctr">
               <a:defRPr sz="2000" b="1">
                 <a:solidFill>
-                  <a:srgbClr val="16A34A"/>
-                </a:solidFill>
-                <a:latin typeface="Calibri"/>
-              </a:defRPr>
-            </a:pPr>
-            <a:r>
-              <a:t>✓</a:t>
+                  <a:srgbClr val="DC2626"/>
+                </a:solidFill>
+                <a:latin typeface="Calibri"/>
+              </a:defRPr>
+            </a:pPr>
+            <a:r>
+              <a:t>✗</a:t>
             </a:r>
           </a:p>
         </p:txBody>
@@ -9340,8 +9340,8 @@
         </p:nvSpPr>
         <p:spPr>
           <a:xfrm>
-            <a:off x="4663440" y="5669280"/>
-            <a:ext cx="1188720" cy="548640"/>
+            <a:off x="4663440" y="5257800"/>
+            <a:ext cx="1188720" cy="502920"/>
           </a:xfrm>
           <a:prstGeom prst="rect">
             <a:avLst/>
@@ -9374,13 +9374,13 @@
             <a:pPr algn="ctr">
               <a:defRPr sz="2000" b="1">
                 <a:solidFill>
-                  <a:srgbClr val="F59E0B"/>
-                </a:solidFill>
-                <a:latin typeface="Calibri"/>
-              </a:defRPr>
-            </a:pPr>
-            <a:r>
-              <a:t>◐</a:t>
+                  <a:srgbClr val="DC2626"/>
+                </a:solidFill>
+                <a:latin typeface="Calibri"/>
+              </a:defRPr>
+            </a:pPr>
+            <a:r>
+              <a:t>✗</a:t>
             </a:r>
           </a:p>
         </p:txBody>
@@ -9393,8 +9393,8 @@
         </p:nvSpPr>
         <p:spPr>
           <a:xfrm>
-            <a:off x="5852160" y="5669280"/>
-            <a:ext cx="1188720" cy="548640"/>
+            <a:off x="5852160" y="5257800"/>
+            <a:ext cx="1188720" cy="502920"/>
           </a:xfrm>
           <a:prstGeom prst="rect">
             <a:avLst/>
@@ -9427,13 +9427,13 @@
             <a:pPr algn="ctr">
               <a:defRPr sz="2000" b="1">
                 <a:solidFill>
-                  <a:srgbClr val="16A34A"/>
-                </a:solidFill>
-                <a:latin typeface="Calibri"/>
-              </a:defRPr>
-            </a:pPr>
-            <a:r>
-              <a:t>✓</a:t>
+                  <a:srgbClr val="DC2626"/>
+                </a:solidFill>
+                <a:latin typeface="Calibri"/>
+              </a:defRPr>
+            </a:pPr>
+            <a:r>
+              <a:t>✗</a:t>
             </a:r>
           </a:p>
         </p:txBody>
@@ -9446,8 +9446,8 @@
         </p:nvSpPr>
         <p:spPr>
           <a:xfrm>
-            <a:off x="7040880" y="5669280"/>
-            <a:ext cx="1188720" cy="548640"/>
+            <a:off x="7040880" y="5257800"/>
+            <a:ext cx="1188720" cy="502920"/>
           </a:xfrm>
           <a:prstGeom prst="rect">
             <a:avLst/>
@@ -9480,13 +9480,13 @@
             <a:pPr algn="ctr">
               <a:defRPr sz="2000" b="1">
                 <a:solidFill>
-                  <a:srgbClr val="F59E0B"/>
-                </a:solidFill>
-                <a:latin typeface="Calibri"/>
-              </a:defRPr>
-            </a:pPr>
-            <a:r>
-              <a:t>◐</a:t>
+                  <a:srgbClr val="DC2626"/>
+                </a:solidFill>
+                <a:latin typeface="Calibri"/>
+              </a:defRPr>
+            </a:pPr>
+            <a:r>
+              <a:t>✗</a:t>
             </a:r>
           </a:p>
         </p:txBody>
@@ -9499,8 +9499,8 @@
         </p:nvSpPr>
         <p:spPr>
           <a:xfrm>
-            <a:off x="8229600" y="5669280"/>
-            <a:ext cx="1188720" cy="548640"/>
+            <a:off x="8229600" y="5257800"/>
+            <a:ext cx="1188720" cy="502920"/>
           </a:xfrm>
           <a:prstGeom prst="rect">
             <a:avLst/>
@@ -9533,13 +9533,13 @@
             <a:pPr algn="ctr">
               <a:defRPr sz="2000" b="1">
                 <a:solidFill>
-                  <a:srgbClr val="F59E0B"/>
-                </a:solidFill>
-                <a:latin typeface="Calibri"/>
-              </a:defRPr>
-            </a:pPr>
-            <a:r>
-              <a:t>◐</a:t>
+                  <a:srgbClr val="DC2626"/>
+                </a:solidFill>
+                <a:latin typeface="Calibri"/>
+              </a:defRPr>
+            </a:pPr>
+            <a:r>
+              <a:t>✗</a:t>
             </a:r>
           </a:p>
         </p:txBody>
@@ -9552,8 +9552,8 @@
         </p:nvSpPr>
         <p:spPr>
           <a:xfrm>
-            <a:off x="9418320" y="5669280"/>
-            <a:ext cx="1188720" cy="548640"/>
+            <a:off x="9418320" y="5257800"/>
+            <a:ext cx="1188720" cy="502920"/>
           </a:xfrm>
           <a:prstGeom prst="rect">
             <a:avLst/>
@@ -9605,8 +9605,8 @@
         </p:nvSpPr>
         <p:spPr>
           <a:xfrm>
-            <a:off x="10607040" y="5669280"/>
-            <a:ext cx="1188720" cy="548640"/>
+            <a:off x="10607040" y="5257800"/>
+            <a:ext cx="1188720" cy="502920"/>
           </a:xfrm>
           <a:prstGeom prst="rect">
             <a:avLst/>
@@ -9639,6 +9639,430 @@
             <a:pPr algn="ctr">
               <a:defRPr sz="2000" b="1">
                 <a:solidFill>
+                  <a:srgbClr val="F59E0B"/>
+                </a:solidFill>
+                <a:latin typeface="Calibri"/>
+              </a:defRPr>
+            </a:pPr>
+            <a:r>
+              <a:t>◐</a:t>
+            </a:r>
+          </a:p>
+        </p:txBody>
+      </p:sp>
+      <p:sp>
+        <p:nvSpPr>
+          <p:cNvPr id="89" name="Rectangle 88"/>
+          <p:cNvSpPr/>
+          <p:nvPr/>
+        </p:nvSpPr>
+        <p:spPr>
+          <a:xfrm>
+            <a:off x="274320" y="5760720"/>
+            <a:ext cx="2011680" cy="502920"/>
+          </a:xfrm>
+          <a:prstGeom prst="rect">
+            <a:avLst/>
+          </a:prstGeom>
+          <a:solidFill>
+            <a:srgbClr val="FFFFFF"/>
+          </a:solidFill>
+          <a:ln>
+            <a:noFill/>
+          </a:ln>
+        </p:spPr>
+        <p:style>
+          <a:lnRef idx="1">
+            <a:schemeClr val="accent1"/>
+          </a:lnRef>
+          <a:fillRef idx="3">
+            <a:schemeClr val="accent1"/>
+          </a:fillRef>
+          <a:effectRef idx="2">
+            <a:schemeClr val="accent1"/>
+          </a:effectRef>
+          <a:fontRef idx="minor">
+            <a:schemeClr val="lt1"/>
+          </a:fontRef>
+        </p:style>
+        <p:txBody>
+          <a:bodyPr rtlCol="0" anchor="ctr" wrap="square" lIns="127000" rIns="76200" tIns="50800" bIns="50800"/>
+          <a:lstStyle/>
+          <a:p>
+            <a:pPr algn="l">
+              <a:defRPr sz="1200" b="1">
+                <a:solidFill>
+                  <a:srgbClr val="1F2A37"/>
+                </a:solidFill>
+                <a:latin typeface="Calibri"/>
+              </a:defRPr>
+            </a:pPr>
+            <a:r>
+              <a:t>Reporting Module</a:t>
+            </a:r>
+          </a:p>
+        </p:txBody>
+      </p:sp>
+      <p:sp>
+        <p:nvSpPr>
+          <p:cNvPr id="90" name="Rectangle 89"/>
+          <p:cNvSpPr/>
+          <p:nvPr/>
+        </p:nvSpPr>
+        <p:spPr>
+          <a:xfrm>
+            <a:off x="2286000" y="5760720"/>
+            <a:ext cx="1188720" cy="502920"/>
+          </a:xfrm>
+          <a:prstGeom prst="rect">
+            <a:avLst/>
+          </a:prstGeom>
+          <a:solidFill>
+            <a:srgbClr val="FFFFFF"/>
+          </a:solidFill>
+          <a:ln>
+            <a:noFill/>
+          </a:ln>
+        </p:spPr>
+        <p:style>
+          <a:lnRef idx="1">
+            <a:schemeClr val="accent1"/>
+          </a:lnRef>
+          <a:fillRef idx="3">
+            <a:schemeClr val="accent1"/>
+          </a:fillRef>
+          <a:effectRef idx="2">
+            <a:schemeClr val="accent1"/>
+          </a:effectRef>
+          <a:fontRef idx="minor">
+            <a:schemeClr val="lt1"/>
+          </a:fontRef>
+        </p:style>
+        <p:txBody>
+          <a:bodyPr rtlCol="0" anchor="ctr" wrap="square" lIns="76200" rIns="76200" tIns="50800" bIns="50800"/>
+          <a:lstStyle/>
+          <a:p>
+            <a:pPr algn="ctr">
+              <a:defRPr sz="2000" b="1">
+                <a:solidFill>
+                  <a:srgbClr val="16A34A"/>
+                </a:solidFill>
+                <a:latin typeface="Calibri"/>
+              </a:defRPr>
+            </a:pPr>
+            <a:r>
+              <a:t>✓</a:t>
+            </a:r>
+          </a:p>
+        </p:txBody>
+      </p:sp>
+      <p:sp>
+        <p:nvSpPr>
+          <p:cNvPr id="91" name="Rectangle 90"/>
+          <p:cNvSpPr/>
+          <p:nvPr/>
+        </p:nvSpPr>
+        <p:spPr>
+          <a:xfrm>
+            <a:off x="3474720" y="5760720"/>
+            <a:ext cx="1188720" cy="502920"/>
+          </a:xfrm>
+          <a:prstGeom prst="rect">
+            <a:avLst/>
+          </a:prstGeom>
+          <a:solidFill>
+            <a:srgbClr val="FFFFFF"/>
+          </a:solidFill>
+          <a:ln>
+            <a:noFill/>
+          </a:ln>
+        </p:spPr>
+        <p:style>
+          <a:lnRef idx="1">
+            <a:schemeClr val="accent1"/>
+          </a:lnRef>
+          <a:fillRef idx="3">
+            <a:schemeClr val="accent1"/>
+          </a:fillRef>
+          <a:effectRef idx="2">
+            <a:schemeClr val="accent1"/>
+          </a:effectRef>
+          <a:fontRef idx="minor">
+            <a:schemeClr val="lt1"/>
+          </a:fontRef>
+        </p:style>
+        <p:txBody>
+          <a:bodyPr rtlCol="0" anchor="ctr" wrap="square" lIns="76200" rIns="76200" tIns="50800" bIns="50800"/>
+          <a:lstStyle/>
+          <a:p>
+            <a:pPr algn="ctr">
+              <a:defRPr sz="2000" b="1">
+                <a:solidFill>
+                  <a:srgbClr val="16A34A"/>
+                </a:solidFill>
+                <a:latin typeface="Calibri"/>
+              </a:defRPr>
+            </a:pPr>
+            <a:r>
+              <a:t>✓</a:t>
+            </a:r>
+          </a:p>
+        </p:txBody>
+      </p:sp>
+      <p:sp>
+        <p:nvSpPr>
+          <p:cNvPr id="92" name="Rectangle 91"/>
+          <p:cNvSpPr/>
+          <p:nvPr/>
+        </p:nvSpPr>
+        <p:spPr>
+          <a:xfrm>
+            <a:off x="4663440" y="5760720"/>
+            <a:ext cx="1188720" cy="502920"/>
+          </a:xfrm>
+          <a:prstGeom prst="rect">
+            <a:avLst/>
+          </a:prstGeom>
+          <a:solidFill>
+            <a:srgbClr val="FFFFFF"/>
+          </a:solidFill>
+          <a:ln>
+            <a:noFill/>
+          </a:ln>
+        </p:spPr>
+        <p:style>
+          <a:lnRef idx="1">
+            <a:schemeClr val="accent1"/>
+          </a:lnRef>
+          <a:fillRef idx="3">
+            <a:schemeClr val="accent1"/>
+          </a:fillRef>
+          <a:effectRef idx="2">
+            <a:schemeClr val="accent1"/>
+          </a:effectRef>
+          <a:fontRef idx="minor">
+            <a:schemeClr val="lt1"/>
+          </a:fontRef>
+        </p:style>
+        <p:txBody>
+          <a:bodyPr rtlCol="0" anchor="ctr" wrap="square" lIns="76200" rIns="76200" tIns="50800" bIns="50800"/>
+          <a:lstStyle/>
+          <a:p>
+            <a:pPr algn="ctr">
+              <a:defRPr sz="2000" b="1">
+                <a:solidFill>
+                  <a:srgbClr val="F59E0B"/>
+                </a:solidFill>
+                <a:latin typeface="Calibri"/>
+              </a:defRPr>
+            </a:pPr>
+            <a:r>
+              <a:t>◐</a:t>
+            </a:r>
+          </a:p>
+        </p:txBody>
+      </p:sp>
+      <p:sp>
+        <p:nvSpPr>
+          <p:cNvPr id="93" name="Rectangle 92"/>
+          <p:cNvSpPr/>
+          <p:nvPr/>
+        </p:nvSpPr>
+        <p:spPr>
+          <a:xfrm>
+            <a:off x="5852160" y="5760720"/>
+            <a:ext cx="1188720" cy="502920"/>
+          </a:xfrm>
+          <a:prstGeom prst="rect">
+            <a:avLst/>
+          </a:prstGeom>
+          <a:solidFill>
+            <a:srgbClr val="FFFFFF"/>
+          </a:solidFill>
+          <a:ln>
+            <a:noFill/>
+          </a:ln>
+        </p:spPr>
+        <p:style>
+          <a:lnRef idx="1">
+            <a:schemeClr val="accent1"/>
+          </a:lnRef>
+          <a:fillRef idx="3">
+            <a:schemeClr val="accent1"/>
+          </a:fillRef>
+          <a:effectRef idx="2">
+            <a:schemeClr val="accent1"/>
+          </a:effectRef>
+          <a:fontRef idx="minor">
+            <a:schemeClr val="lt1"/>
+          </a:fontRef>
+        </p:style>
+        <p:txBody>
+          <a:bodyPr rtlCol="0" anchor="ctr" wrap="square" lIns="76200" rIns="76200" tIns="50800" bIns="50800"/>
+          <a:lstStyle/>
+          <a:p>
+            <a:pPr algn="ctr">
+              <a:defRPr sz="2000" b="1">
+                <a:solidFill>
+                  <a:srgbClr val="16A34A"/>
+                </a:solidFill>
+                <a:latin typeface="Calibri"/>
+              </a:defRPr>
+            </a:pPr>
+            <a:r>
+              <a:t>✓</a:t>
+            </a:r>
+          </a:p>
+        </p:txBody>
+      </p:sp>
+      <p:sp>
+        <p:nvSpPr>
+          <p:cNvPr id="94" name="Rectangle 93"/>
+          <p:cNvSpPr/>
+          <p:nvPr/>
+        </p:nvSpPr>
+        <p:spPr>
+          <a:xfrm>
+            <a:off x="7040880" y="5760720"/>
+            <a:ext cx="1188720" cy="502920"/>
+          </a:xfrm>
+          <a:prstGeom prst="rect">
+            <a:avLst/>
+          </a:prstGeom>
+          <a:solidFill>
+            <a:srgbClr val="FFFFFF"/>
+          </a:solidFill>
+          <a:ln>
+            <a:noFill/>
+          </a:ln>
+        </p:spPr>
+        <p:style>
+          <a:lnRef idx="1">
+            <a:schemeClr val="accent1"/>
+          </a:lnRef>
+          <a:fillRef idx="3">
+            <a:schemeClr val="accent1"/>
+          </a:fillRef>
+          <a:effectRef idx="2">
+            <a:schemeClr val="accent1"/>
+          </a:effectRef>
+          <a:fontRef idx="minor">
+            <a:schemeClr val="lt1"/>
+          </a:fontRef>
+        </p:style>
+        <p:txBody>
+          <a:bodyPr rtlCol="0" anchor="ctr" wrap="square" lIns="76200" rIns="76200" tIns="50800" bIns="50800"/>
+          <a:lstStyle/>
+          <a:p>
+            <a:pPr algn="ctr">
+              <a:defRPr sz="2000" b="1">
+                <a:solidFill>
+                  <a:srgbClr val="F59E0B"/>
+                </a:solidFill>
+                <a:latin typeface="Calibri"/>
+              </a:defRPr>
+            </a:pPr>
+            <a:r>
+              <a:t>◐</a:t>
+            </a:r>
+          </a:p>
+        </p:txBody>
+      </p:sp>
+      <p:sp>
+        <p:nvSpPr>
+          <p:cNvPr id="95" name="Rectangle 94"/>
+          <p:cNvSpPr/>
+          <p:nvPr/>
+        </p:nvSpPr>
+        <p:spPr>
+          <a:xfrm>
+            <a:off x="8229600" y="5760720"/>
+            <a:ext cx="1188720" cy="502920"/>
+          </a:xfrm>
+          <a:prstGeom prst="rect">
+            <a:avLst/>
+          </a:prstGeom>
+          <a:solidFill>
+            <a:srgbClr val="FFFFFF"/>
+          </a:solidFill>
+          <a:ln>
+            <a:noFill/>
+          </a:ln>
+        </p:spPr>
+        <p:style>
+          <a:lnRef idx="1">
+            <a:schemeClr val="accent1"/>
+          </a:lnRef>
+          <a:fillRef idx="3">
+            <a:schemeClr val="accent1"/>
+          </a:fillRef>
+          <a:effectRef idx="2">
+            <a:schemeClr val="accent1"/>
+          </a:effectRef>
+          <a:fontRef idx="minor">
+            <a:schemeClr val="lt1"/>
+          </a:fontRef>
+        </p:style>
+        <p:txBody>
+          <a:bodyPr rtlCol="0" anchor="ctr" wrap="square" lIns="76200" rIns="76200" tIns="50800" bIns="50800"/>
+          <a:lstStyle/>
+          <a:p>
+            <a:pPr algn="ctr">
+              <a:defRPr sz="2000" b="1">
+                <a:solidFill>
+                  <a:srgbClr val="F59E0B"/>
+                </a:solidFill>
+                <a:latin typeface="Calibri"/>
+              </a:defRPr>
+            </a:pPr>
+            <a:r>
+              <a:t>◐</a:t>
+            </a:r>
+          </a:p>
+        </p:txBody>
+      </p:sp>
+      <p:sp>
+        <p:nvSpPr>
+          <p:cNvPr id="96" name="Rectangle 95"/>
+          <p:cNvSpPr/>
+          <p:nvPr/>
+        </p:nvSpPr>
+        <p:spPr>
+          <a:xfrm>
+            <a:off x="9418320" y="5760720"/>
+            <a:ext cx="1188720" cy="502920"/>
+          </a:xfrm>
+          <a:prstGeom prst="rect">
+            <a:avLst/>
+          </a:prstGeom>
+          <a:solidFill>
+            <a:srgbClr val="FFFFFF"/>
+          </a:solidFill>
+          <a:ln>
+            <a:noFill/>
+          </a:ln>
+        </p:spPr>
+        <p:style>
+          <a:lnRef idx="1">
+            <a:schemeClr val="accent1"/>
+          </a:lnRef>
+          <a:fillRef idx="3">
+            <a:schemeClr val="accent1"/>
+          </a:fillRef>
+          <a:effectRef idx="2">
+            <a:schemeClr val="accent1"/>
+          </a:effectRef>
+          <a:fontRef idx="minor">
+            <a:schemeClr val="lt1"/>
+          </a:fontRef>
+        </p:style>
+        <p:txBody>
+          <a:bodyPr rtlCol="0" anchor="ctr" wrap="square" lIns="76200" rIns="76200" tIns="50800" bIns="50800"/>
+          <a:lstStyle/>
+          <a:p>
+            <a:pPr algn="ctr">
+              <a:defRPr sz="2000" b="1">
+                <a:solidFill>
                   <a:srgbClr val="DC2626"/>
                 </a:solidFill>
                 <a:latin typeface="Calibri"/>
@@ -9652,14 +10076,67 @@
       </p:sp>
       <p:sp>
         <p:nvSpPr>
-          <p:cNvPr id="89" name="Rectangle 88"/>
-          <p:cNvSpPr/>
-          <p:nvPr/>
-        </p:nvSpPr>
-        <p:spPr>
-          <a:xfrm>
-            <a:off x="2286000" y="1280160"/>
-            <a:ext cx="1188720" cy="4937760"/>
+          <p:cNvPr id="97" name="Rectangle 96"/>
+          <p:cNvSpPr/>
+          <p:nvPr/>
+        </p:nvSpPr>
+        <p:spPr>
+          <a:xfrm>
+            <a:off x="10607040" y="5760720"/>
+            <a:ext cx="1188720" cy="502920"/>
+          </a:xfrm>
+          <a:prstGeom prst="rect">
+            <a:avLst/>
+          </a:prstGeom>
+          <a:solidFill>
+            <a:srgbClr val="FFFFFF"/>
+          </a:solidFill>
+          <a:ln>
+            <a:noFill/>
+          </a:ln>
+        </p:spPr>
+        <p:style>
+          <a:lnRef idx="1">
+            <a:schemeClr val="accent1"/>
+          </a:lnRef>
+          <a:fillRef idx="3">
+            <a:schemeClr val="accent1"/>
+          </a:fillRef>
+          <a:effectRef idx="2">
+            <a:schemeClr val="accent1"/>
+          </a:effectRef>
+          <a:fontRef idx="minor">
+            <a:schemeClr val="lt1"/>
+          </a:fontRef>
+        </p:style>
+        <p:txBody>
+          <a:bodyPr rtlCol="0" anchor="ctr" wrap="square" lIns="76200" rIns="76200" tIns="50800" bIns="50800"/>
+          <a:lstStyle/>
+          <a:p>
+            <a:pPr algn="ctr">
+              <a:defRPr sz="2000" b="1">
+                <a:solidFill>
+                  <a:srgbClr val="DC2626"/>
+                </a:solidFill>
+                <a:latin typeface="Calibri"/>
+              </a:defRPr>
+            </a:pPr>
+            <a:r>
+              <a:t>✗</a:t>
+            </a:r>
+          </a:p>
+        </p:txBody>
+      </p:sp>
+      <p:sp>
+        <p:nvSpPr>
+          <p:cNvPr id="98" name="Rectangle 97"/>
+          <p:cNvSpPr/>
+          <p:nvPr/>
+        </p:nvSpPr>
+        <p:spPr>
+          <a:xfrm>
+            <a:off x="2286000" y="1234440"/>
+            <a:ext cx="1188720" cy="5029200"/>
           </a:xfrm>
           <a:prstGeom prst="rect">
             <a:avLst/>
@@ -12432,7 +12909,7 @@
               </a:defRPr>
             </a:pPr>
             <a:r>
-              <a:t>5</a:t>
+              <a:t>153/153</a:t>
             </a:r>
           </a:p>
         </p:txBody>
@@ -12471,7 +12948,7 @@
               </a:defRPr>
             </a:pPr>
             <a:r>
-              <a:t>Capacity Assessment Frameworks</a:t>
+              <a:t>Smoke Tests Passing</a:t>
             </a:r>
           </a:p>
         </p:txBody>
@@ -12553,7 +13030,7 @@
               </a:defRPr>
             </a:pPr>
             <a:r>
-              <a:t>7</a:t>
+              <a:t>100+</a:t>
             </a:r>
           </a:p>
         </p:txBody>
@@ -12592,7 +13069,7 @@
               </a:defRPr>
             </a:pPr>
             <a:r>
-              <a:t>Country Registry Verifications</a:t>
+              <a:t>Browser UAT Specs</a:t>
             </a:r>
           </a:p>
         </p:txBody>
@@ -12674,7 +13151,7 @@
               </a:defRPr>
             </a:pPr>
             <a:r>
-              <a:t>4+</a:t>
+              <a:t>6</a:t>
             </a:r>
           </a:p>
         </p:txBody>
@@ -12713,7 +13190,7 @@
               </a:defRPr>
             </a:pPr>
             <a:r>
-              <a:t>Sanctions Databases</a:t>
+              <a:t>Languages Live (EN/FR/AR/SW/SO/ES)</a:t>
             </a:r>
           </a:p>
         </p:txBody>
@@ -12795,7 +13272,7 @@
               </a:defRPr>
             </a:pPr>
             <a:r>
-              <a:t>5</a:t>
+              <a:t>0</a:t>
             </a:r>
           </a:p>
         </p:txBody>
@@ -12834,7 +13311,7 @@
               </a:defRPr>
             </a:pPr>
             <a:r>
-              <a:t>Languages Supported</a:t>
+              <a:t>Prod Regressions Reported by Users</a:t>
             </a:r>
           </a:p>
         </p:txBody>
@@ -12847,8 +13324,8 @@
         </p:nvSpPr>
         <p:spPr>
           <a:xfrm>
-            <a:off x="822960" y="4572000"/>
-            <a:ext cx="3200400" cy="457200"/>
+            <a:off x="640080" y="4572000"/>
+            <a:ext cx="2834640" cy="457200"/>
           </a:xfrm>
           <a:prstGeom prst="roundRect">
             <a:avLst/>
@@ -12887,7 +13364,7 @@
               </a:defRPr>
             </a:pPr>
             <a:r>
-              <a:t>✓  Live AI platform in production</a:t>
+              <a:t>✓  Sustained AI chat threads</a:t>
             </a:r>
           </a:p>
         </p:txBody>
@@ -12900,8 +13377,8 @@
         </p:nvSpPr>
         <p:spPr>
           <a:xfrm>
-            <a:off x="4297680" y="4572000"/>
-            <a:ext cx="3200400" cy="457200"/>
+            <a:off x="3749040" y="4572000"/>
+            <a:ext cx="4206240" cy="457200"/>
           </a:xfrm>
           <a:prstGeom prst="roundRect">
             <a:avLst/>
@@ -12940,7 +13417,7 @@
               </a:defRPr>
             </a:pPr>
             <a:r>
-              <a:t>✓  Multi-language (EN/FR/AR/SW/SO)</a:t>
+              <a:t>✓  Reviewer auto-assignment + nightly backfill cron</a:t>
             </a:r>
           </a:p>
         </p:txBody>
@@ -12953,8 +13430,8 @@
         </p:nvSpPr>
         <p:spPr>
           <a:xfrm>
-            <a:off x="7772400" y="4572000"/>
-            <a:ext cx="3017520" cy="457200"/>
+            <a:off x="8229600" y="4572000"/>
+            <a:ext cx="4023360" cy="457200"/>
           </a:xfrm>
           <a:prstGeom prst="roundRect">
             <a:avLst/>
@@ -12993,7 +13470,7 @@
               </a:defRPr>
             </a:pPr>
             <a:r>
-              <a:t>✓  ERP (Odoo 17) in development</a:t>
+              <a:t>✓  Real-user metrics + NPS micro-survey live in prod</a:t>
             </a:r>
           </a:p>
         </p:txBody>
@@ -17434,7 +17911,7 @@
               </a:defRPr>
             </a:pPr>
             <a:r>
-              <a:t>•  Trust and credibility with donors AND</a:t>
+              <a:t>•  Multi-language: Arabic, French, Spanish</a:t>
             </a:r>
           </a:p>
           <a:p>
@@ -17453,7 +17930,7 @@
               </a:defRPr>
             </a:pPr>
             <a:r>
-              <a:t>   local organizations</a:t>
+              <a:t>   live today — no competitor offers this</a:t>
             </a:r>
           </a:p>
           <a:p>
@@ -19526,7 +20003,7 @@
               </a:defRPr>
             </a:pPr>
             <a:r>
-              <a:t>Document Analysis</a:t>
+              <a:t>Sustained Chat Threads</a:t>
             </a:r>
           </a:p>
         </p:txBody>
@@ -19565,7 +20042,7 @@
               </a:defRPr>
             </a:pPr>
             <a:r>
-              <a:t>Score 0–100 with detailed findings</a:t>
+              <a:t>Per-entity scoped with memory + reset</a:t>
             </a:r>
           </a:p>
         </p:txBody>
@@ -19743,7 +20220,7 @@
               </a:defRPr>
             </a:pPr>
             <a:r>
-              <a:t>Grant Agreement Parsing</a:t>
+              <a:t>Document Analysis</a:t>
             </a:r>
           </a:p>
         </p:txBody>
@@ -19782,7 +20259,7 @@
               </a:defRPr>
             </a:pPr>
             <a:r>
-              <a:t>Extract requirements automatically</a:t>
+              <a:t>Score 0–100 with detailed findings</a:t>
             </a:r>
           </a:p>
         </p:txBody>
@@ -19960,7 +20437,7 @@
               </a:defRPr>
             </a:pPr>
             <a:r>
-              <a:t>Report Evaluation</a:t>
+              <a:t>Grant Agreement Parsing</a:t>
             </a:r>
           </a:p>
         </p:txBody>
@@ -19999,7 +20476,7 @@
               </a:defRPr>
             </a:pPr>
             <a:r>
-              <a:t>Per-requirement compliance scoring</a:t>
+              <a:t>Extract requirements automatically</a:t>
             </a:r>
           </a:p>
         </p:txBody>
@@ -20177,7 +20654,7 @@
               </a:defRPr>
             </a:pPr>
             <a:r>
-              <a:t>Capacity Assessment</a:t>
+              <a:t>Report Evaluation</a:t>
             </a:r>
           </a:p>
         </p:txBody>
@@ -20216,7 +20693,7 @@
               </a:defRPr>
             </a:pPr>
             <a:r>
-              <a:t>AI reviews policies, identifies gaps</a:t>
+              <a:t>Per-requirement compliance scoring</a:t>
             </a:r>
           </a:p>
         </p:txBody>
@@ -20394,7 +20871,7 @@
               </a:defRPr>
             </a:pPr>
             <a:r>
-              <a:t>Grant Matching</a:t>
+              <a:t>Capacity Assessment</a:t>
             </a:r>
           </a:p>
         </p:txBody>
@@ -20433,7 +20910,7 @@
               </a:defRPr>
             </a:pPr>
             <a:r>
-              <a:t>Smart NGO-donor matching algorithm</a:t>
+              <a:t>AI reviews policies, identifies gaps</a:t>
             </a:r>
           </a:p>
         </p:txBody>
@@ -20611,7 +21088,7 @@
               </a:defRPr>
             </a:pPr>
             <a:r>
-              <a:t>Chat Assistant</a:t>
+              <a:t>Reviewer Match + Auto-Assign</a:t>
             </a:r>
           </a:p>
         </p:txBody>
@@ -20650,7 +21127,7 @@
               </a:defRPr>
             </a:pPr>
             <a:r>
-              <a:t>Role-aware guidance (NGO vs Donor)</a:t>
+              <a:t>Fires on submit, cron backfill</a:t>
             </a:r>
           </a:p>
         </p:txBody>
@@ -20703,7 +21180,7 @@
               </a:defRPr>
             </a:pPr>
             <a:r>
-              <a:t>Powered by Anthropic Claude  |  Multi-language: EN, FR, AR, SW, SO</a:t>
+              <a:t>Powered by Anthropic Claude  |  6 languages live (EN, FR, AR, ES, SW, SO)  —  every AI output cited + measured</a:t>
             </a:r>
           </a:p>
         </p:txBody>
